--- a/assets/brand/ermstrang-logo-bewerkbaar.pptx
+++ b/assets/brand/ermstrang-logo-bewerkbaar.pptx
@@ -3260,7 +3260,7 @@
                 </a:solidFill>
                 <a:latin typeface="Source Sans 3"/>
               </a:rPr>
-              <a:t>AI-assistenten op maat voor zzp en mkb · ermstrang.nl</a:t>
+              <a:t>AI-assistenten op maat voor zzp en mkb · ermstrangtechnologies.nl</a:t>
             </a:r>
           </a:p>
         </p:txBody>
